--- a/sample-documents/11-advisor-compliance-checklist.pptx
+++ b/sample-documents/11-advisor-compliance-checklist.pptx
@@ -12,7 +12,7 @@
           </a:p>
           <a:p>
             <a:r>
-              <a:t>Advisor Compliance Checklist. Business area: Compliance. Audience: Advisor. Content owner: Unassigned. Last reviewed age days: 250. Advisor-facing compliance checklist for approved language and review history.</a:t>
+              <a:t>Advisor Compliance Checklist. Business area: Compliance. Audience: Advisor. Content owner: Unassigned. Author: Sample Author 09. Language: English. Country of origin: India. Sentiment: Neutral. Approval status: Pending. Last reviewed age days: 250. Lists required disclosures, approved phrases, and evidence checks. Advisors should record completion before sharing recommendations.</a:t>
             </a:r>
           </a:p>
         </p:txBody>
